--- a/tests/golden/visual/composition/v21_design_strategy/deck.pptx
+++ b/tests/golden/visual/composition/v21_design_strategy/deck.pptx
@@ -987,7 +987,7 @@
         </p:nvSpPr>
         <p:spPr>
           <a:xfrm>
-            <a:off x="640080" y="1436370"/>
+            <a:off x="640080" y="1474470"/>
             <a:ext cx="2545080" cy="658368"/>
           </a:xfrm>
           <a:prstGeom prst="rect">
@@ -1026,7 +1026,7 @@
         </p:nvSpPr>
         <p:spPr>
           <a:xfrm>
-            <a:off x="3299460" y="1436370"/>
+            <a:off x="3299460" y="1474470"/>
             <a:ext cx="2545080" cy="658368"/>
           </a:xfrm>
           <a:prstGeom prst="rect">
@@ -1065,7 +1065,7 @@
         </p:nvSpPr>
         <p:spPr>
           <a:xfrm>
-            <a:off x="5958840" y="1436370"/>
+            <a:off x="5958840" y="1474470"/>
             <a:ext cx="2545080" cy="658368"/>
           </a:xfrm>
           <a:prstGeom prst="rect">
@@ -1104,8 +1104,8 @@
         </p:nvSpPr>
         <p:spPr>
           <a:xfrm>
-            <a:off x="640080" y="2209038"/>
-            <a:ext cx="4781093" cy="1623822"/>
+            <a:off x="640080" y="2247138"/>
+            <a:ext cx="4472635" cy="1814322"/>
           </a:xfrm>
           <a:prstGeom prst="rect">
             <a:avLst/>
@@ -1129,8 +1129,8 @@
         </p:nvSpPr>
         <p:spPr>
           <a:xfrm>
-            <a:off x="777240" y="2838069"/>
-            <a:ext cx="4506773" cy="365760"/>
+            <a:off x="777240" y="2971419"/>
+            <a:ext cx="4198315" cy="365760"/>
           </a:xfrm>
           <a:prstGeom prst="rect">
             <a:avLst/>
@@ -1154,7 +1154,7 @@
                 <a:ea typeface="Microsoft YaHei" pitchFamily="34" charset="-122"/>
                 <a:cs typeface="Microsoft YaHei" pitchFamily="34" charset="-120"/>
               </a:rPr>
-              <a:t>技术图纸缺失</a:t>
+              <a:t>素材缺失/路径未解析</a:t>
             </a:r>
             <a:endParaRPr lang="en-US" sz="1200" dirty="0"/>
           </a:p>
@@ -1168,8 +1168,8 @@
         </p:nvSpPr>
         <p:spPr>
           <a:xfrm>
-            <a:off x="5573573" y="2209038"/>
-            <a:ext cx="2930347" cy="1623822"/>
+            <a:off x="5265115" y="2247138"/>
+            <a:ext cx="3238805" cy="1814322"/>
           </a:xfrm>
           <a:prstGeom prst="rect">
             <a:avLst/>
